--- a/chapter8/parts/part-10-advanced-and-emerging/clip.pptx
+++ b/chapter8/parts/part-10-advanced-and-emerging/clip.pptx
@@ -4328,10 +4328,12 @@
           </a:bodyPr>
           <a:lstStyle/>
           <a:p>
-            <a:pPr>
+            <a:pPr lvl="0" marL="457200" indent="-228600">
+              <a:buFont typeface="Calibri"/>
               <a:spcAft>
                 <a:spcPts val="1000"/>
               </a:spcAft>
+              <a:buSzPct val="100000"/>
               <a:buChar char="•"/>
               <a:lnSpc>
                 <a:spcPts val="2200"/>
@@ -4348,10 +4350,12 @@
             </a:r>
           </a:p>
           <a:p>
-            <a:pPr>
+            <a:pPr lvl="0" marL="457200" indent="-228600">
+              <a:buFont typeface="Calibri"/>
               <a:spcAft>
                 <a:spcPts val="1000"/>
               </a:spcAft>
+              <a:buSzPct val="100000"/>
               <a:buChar char="•"/>
               <a:lnSpc>
                 <a:spcPts val="2200"/>
@@ -4368,10 +4372,12 @@
             </a:r>
           </a:p>
           <a:p>
-            <a:pPr>
+            <a:pPr lvl="0" marL="457200" indent="-228600">
+              <a:buFont typeface="Calibri"/>
               <a:spcAft>
                 <a:spcPts val="1000"/>
               </a:spcAft>
+              <a:buSzPct val="100000"/>
               <a:buChar char="•"/>
               <a:lnSpc>
                 <a:spcPts val="2200"/>
@@ -4388,10 +4394,12 @@
             </a:r>
           </a:p>
           <a:p>
-            <a:pPr>
+            <a:pPr lvl="0" marL="457200" indent="-228600">
+              <a:buFont typeface="Calibri"/>
               <a:spcAft>
                 <a:spcPts val="1000"/>
               </a:spcAft>
+              <a:buSzPct val="100000"/>
               <a:buChar char="•"/>
               <a:lnSpc>
                 <a:spcPts val="2200"/>
@@ -4527,10 +4535,12 @@
           </a:bodyPr>
           <a:lstStyle/>
           <a:p>
-            <a:pPr>
+            <a:pPr lvl="0" marL="457200" indent="-228600">
+              <a:buFont typeface="Calibri"/>
               <a:spcAft>
                 <a:spcPts val="1000"/>
               </a:spcAft>
+              <a:buSzPct val="100000"/>
               <a:buChar char="•"/>
               <a:lnSpc>
                 <a:spcPts val="2200"/>
@@ -4547,10 +4557,12 @@
             </a:r>
           </a:p>
           <a:p>
-            <a:pPr>
+            <a:pPr lvl="0" marL="457200" indent="-228600">
+              <a:buFont typeface="Calibri"/>
               <a:spcAft>
                 <a:spcPts val="1000"/>
               </a:spcAft>
+              <a:buSzPct val="100000"/>
               <a:buChar char="•"/>
               <a:lnSpc>
                 <a:spcPts val="2200"/>
@@ -4567,10 +4579,12 @@
             </a:r>
           </a:p>
           <a:p>
-            <a:pPr>
+            <a:pPr lvl="0" marL="457200" indent="-228600">
+              <a:buFont typeface="Calibri"/>
               <a:spcAft>
                 <a:spcPts val="1000"/>
               </a:spcAft>
+              <a:buSzPct val="100000"/>
               <a:buChar char="•"/>
               <a:lnSpc>
                 <a:spcPts val="2200"/>
@@ -4706,10 +4720,12 @@
           </a:bodyPr>
           <a:lstStyle/>
           <a:p>
-            <a:pPr>
+            <a:pPr lvl="0" marL="457200" indent="-228600">
+              <a:buFont typeface="Calibri"/>
               <a:spcAft>
                 <a:spcPts val="1000"/>
               </a:spcAft>
+              <a:buSzPct val="100000"/>
               <a:buChar char="•"/>
               <a:lnSpc>
                 <a:spcPts val="2200"/>
@@ -4726,10 +4742,12 @@
             </a:r>
           </a:p>
           <a:p>
-            <a:pPr>
+            <a:pPr lvl="0" marL="457200" indent="-228600">
+              <a:buFont typeface="Calibri"/>
               <a:spcAft>
                 <a:spcPts val="1000"/>
               </a:spcAft>
+              <a:buSzPct val="100000"/>
               <a:buChar char="•"/>
               <a:lnSpc>
                 <a:spcPts val="2200"/>
@@ -4865,10 +4883,12 @@
           </a:bodyPr>
           <a:lstStyle/>
           <a:p>
-            <a:pPr>
+            <a:pPr lvl="0" marL="457200" indent="-228600">
+              <a:buFont typeface="Calibri"/>
               <a:spcAft>
                 <a:spcPts val="1000"/>
               </a:spcAft>
+              <a:buSzPct val="100000"/>
               <a:buChar char="•"/>
               <a:lnSpc>
                 <a:spcPts val="2200"/>
@@ -5004,10 +5024,12 @@
           </a:bodyPr>
           <a:lstStyle/>
           <a:p>
-            <a:pPr>
+            <a:pPr lvl="0" marL="457200" indent="-228600">
+              <a:buFont typeface="Calibri"/>
               <a:spcAft>
                 <a:spcPts val="1000"/>
               </a:spcAft>
+              <a:buSzPct val="100000"/>
               <a:buChar char="•"/>
               <a:lnSpc>
                 <a:spcPts val="2200"/>
@@ -5024,10 +5046,12 @@
             </a:r>
           </a:p>
           <a:p>
-            <a:pPr>
+            <a:pPr lvl="0" marL="457200" indent="-228600">
+              <a:buFont typeface="Calibri"/>
               <a:spcAft>
                 <a:spcPts val="1000"/>
               </a:spcAft>
+              <a:buSzPct val="100000"/>
               <a:buChar char="•"/>
               <a:lnSpc>
                 <a:spcPts val="2200"/>
@@ -5044,10 +5068,12 @@
             </a:r>
           </a:p>
           <a:p>
-            <a:pPr>
+            <a:pPr lvl="0" marL="457200" indent="-228600">
+              <a:buFont typeface="Calibri"/>
               <a:spcAft>
                 <a:spcPts val="1000"/>
               </a:spcAft>
+              <a:buSzPct val="100000"/>
               <a:buChar char="•"/>
               <a:lnSpc>
                 <a:spcPts val="2200"/>
@@ -5183,10 +5209,12 @@
           </a:bodyPr>
           <a:lstStyle/>
           <a:p>
-            <a:pPr>
+            <a:pPr lvl="0" marL="457200" indent="-228600">
+              <a:buFont typeface="Calibri"/>
               <a:spcAft>
                 <a:spcPts val="1000"/>
               </a:spcAft>
+              <a:buSzPct val="100000"/>
               <a:buChar char="•"/>
               <a:lnSpc>
                 <a:spcPts val="2200"/>
@@ -5203,10 +5231,12 @@
             </a:r>
           </a:p>
           <a:p>
-            <a:pPr>
+            <a:pPr lvl="0" marL="457200" indent="-228600">
+              <a:buFont typeface="Calibri"/>
               <a:spcAft>
                 <a:spcPts val="1000"/>
               </a:spcAft>
+              <a:buSzPct val="100000"/>
               <a:buChar char="•"/>
               <a:lnSpc>
                 <a:spcPts val="2200"/>
@@ -5223,10 +5253,12 @@
             </a:r>
           </a:p>
           <a:p>
-            <a:pPr>
+            <a:pPr lvl="0" marL="457200" indent="-228600">
+              <a:buFont typeface="Calibri"/>
               <a:spcAft>
                 <a:spcPts val="1000"/>
               </a:spcAft>
+              <a:buSzPct val="100000"/>
               <a:buChar char="•"/>
               <a:lnSpc>
                 <a:spcPts val="2200"/>
@@ -5243,10 +5275,12 @@
             </a:r>
           </a:p>
           <a:p>
-            <a:pPr>
+            <a:pPr lvl="0" marL="457200" indent="-228600">
+              <a:buFont typeface="Calibri"/>
               <a:spcAft>
                 <a:spcPts val="1000"/>
               </a:spcAft>
+              <a:buSzPct val="100000"/>
               <a:buChar char="•"/>
               <a:lnSpc>
                 <a:spcPts val="2200"/>
@@ -5674,10 +5708,12 @@
           </a:bodyPr>
           <a:lstStyle/>
           <a:p>
-            <a:pPr>
+            <a:pPr lvl="0" marL="457200" indent="-228600">
+              <a:buFont typeface="Calibri"/>
               <a:spcAft>
                 <a:spcPts val="1000"/>
               </a:spcAft>
+              <a:buSzPct val="100000"/>
               <a:buChar char="•"/>
               <a:lnSpc>
                 <a:spcPts val="2200"/>
@@ -5694,10 +5730,12 @@
             </a:r>
           </a:p>
           <a:p>
-            <a:pPr>
+            <a:pPr lvl="0" marL="457200" indent="-228600">
+              <a:buFont typeface="Calibri"/>
               <a:spcAft>
                 <a:spcPts val="1000"/>
               </a:spcAft>
+              <a:buSzPct val="100000"/>
               <a:buChar char="•"/>
               <a:lnSpc>
                 <a:spcPts val="2200"/>
@@ -5714,10 +5752,12 @@
             </a:r>
           </a:p>
           <a:p>
-            <a:pPr>
+            <a:pPr lvl="0" marL="457200" indent="-228600">
+              <a:buFont typeface="Calibri"/>
               <a:spcAft>
                 <a:spcPts val="1000"/>
               </a:spcAft>
+              <a:buSzPct val="100000"/>
               <a:buChar char="•"/>
               <a:lnSpc>
                 <a:spcPts val="2200"/>
@@ -5853,10 +5893,12 @@
           </a:bodyPr>
           <a:lstStyle/>
           <a:p>
-            <a:pPr>
+            <a:pPr lvl="0" marL="457200" indent="-228600">
+              <a:buFont typeface="Calibri"/>
               <a:spcAft>
                 <a:spcPts val="1000"/>
               </a:spcAft>
+              <a:buSzPct val="100000"/>
               <a:buChar char="•"/>
               <a:lnSpc>
                 <a:spcPts val="2200"/>
@@ -5873,10 +5915,12 @@
             </a:r>
           </a:p>
           <a:p>
-            <a:pPr>
+            <a:pPr lvl="0" marL="457200" indent="-228600">
+              <a:buFont typeface="Calibri"/>
               <a:spcAft>
                 <a:spcPts val="1000"/>
               </a:spcAft>
+              <a:buSzPct val="100000"/>
               <a:buChar char="•"/>
               <a:lnSpc>
                 <a:spcPts val="2200"/>
@@ -5893,10 +5937,12 @@
             </a:r>
           </a:p>
           <a:p>
-            <a:pPr>
+            <a:pPr lvl="0" marL="457200" indent="-228600">
+              <a:buFont typeface="Calibri"/>
               <a:spcAft>
                 <a:spcPts val="1000"/>
               </a:spcAft>
+              <a:buSzPct val="100000"/>
               <a:buChar char="•"/>
               <a:lnSpc>
                 <a:spcPts val="2200"/>
@@ -5913,10 +5959,12 @@
             </a:r>
           </a:p>
           <a:p>
-            <a:pPr>
+            <a:pPr lvl="0" marL="457200" indent="-228600">
+              <a:buFont typeface="Calibri"/>
               <a:spcAft>
                 <a:spcPts val="1000"/>
               </a:spcAft>
+              <a:buSzPct val="100000"/>
               <a:buChar char="•"/>
               <a:lnSpc>
                 <a:spcPts val="2200"/>
@@ -6439,10 +6487,12 @@
           </a:bodyPr>
           <a:lstStyle/>
           <a:p>
-            <a:pPr>
+            <a:pPr lvl="0" marL="457200" indent="-228600">
+              <a:buFont typeface="Calibri"/>
               <a:spcAft>
                 <a:spcPts val="1000"/>
               </a:spcAft>
+              <a:buSzPct val="100000"/>
               <a:buChar char="•"/>
               <a:lnSpc>
                 <a:spcPts val="2200"/>
@@ -6459,10 +6509,12 @@
             </a:r>
           </a:p>
           <a:p>
-            <a:pPr>
+            <a:pPr lvl="0" marL="457200" indent="-228600">
+              <a:buFont typeface="Calibri"/>
               <a:spcAft>
                 <a:spcPts val="1000"/>
               </a:spcAft>
+              <a:buSzPct val="100000"/>
               <a:buChar char="•"/>
               <a:lnSpc>
                 <a:spcPts val="2200"/>
